--- a/simulador_duofitness/templates/prime.pptx
+++ b/simulador_duofitness/templates/prime.pptx
@@ -350,7 +350,7 @@
             <a:fld id="{1D8BD707-D9CF-40AE-B4C6-C98DA3205C09}" type="datetimeFigureOut">
               <a:rPr lang="en-US" smtClean="0"/>
               <a:pPr/>
-              <a:t>6/26/2026</a:t>
+              <a:t>6/30/2026</a:t>
             </a:fld>
             <a:endParaRPr lang="en-US"/>
           </a:p>
@@ -515,7 +515,7 @@
             <a:fld id="{1D8BD707-D9CF-40AE-B4C6-C98DA3205C09}" type="datetimeFigureOut">
               <a:rPr lang="en-US" smtClean="0"/>
               <a:pPr/>
-              <a:t>6/26/2026</a:t>
+              <a:t>6/30/2026</a:t>
             </a:fld>
             <a:endParaRPr lang="en-US"/>
           </a:p>
@@ -690,7 +690,7 @@
             <a:fld id="{1D8BD707-D9CF-40AE-B4C6-C98DA3205C09}" type="datetimeFigureOut">
               <a:rPr lang="en-US" smtClean="0"/>
               <a:pPr/>
-              <a:t>6/26/2026</a:t>
+              <a:t>6/30/2026</a:t>
             </a:fld>
             <a:endParaRPr lang="en-US"/>
           </a:p>
@@ -855,7 +855,7 @@
             <a:fld id="{1D8BD707-D9CF-40AE-B4C6-C98DA3205C09}" type="datetimeFigureOut">
               <a:rPr lang="en-US" smtClean="0"/>
               <a:pPr/>
-              <a:t>6/26/2026</a:t>
+              <a:t>6/30/2026</a:t>
             </a:fld>
             <a:endParaRPr lang="en-US"/>
           </a:p>
@@ -1097,7 +1097,7 @@
             <a:fld id="{1D8BD707-D9CF-40AE-B4C6-C98DA3205C09}" type="datetimeFigureOut">
               <a:rPr lang="en-US" smtClean="0"/>
               <a:pPr/>
-              <a:t>6/26/2026</a:t>
+              <a:t>6/30/2026</a:t>
             </a:fld>
             <a:endParaRPr lang="en-US"/>
           </a:p>
@@ -1379,7 +1379,7 @@
             <a:fld id="{1D8BD707-D9CF-40AE-B4C6-C98DA3205C09}" type="datetimeFigureOut">
               <a:rPr lang="en-US" smtClean="0"/>
               <a:pPr/>
-              <a:t>6/26/2026</a:t>
+              <a:t>6/30/2026</a:t>
             </a:fld>
             <a:endParaRPr lang="en-US"/>
           </a:p>
@@ -1795,7 +1795,7 @@
             <a:fld id="{1D8BD707-D9CF-40AE-B4C6-C98DA3205C09}" type="datetimeFigureOut">
               <a:rPr lang="en-US" smtClean="0"/>
               <a:pPr/>
-              <a:t>6/26/2026</a:t>
+              <a:t>6/30/2026</a:t>
             </a:fld>
             <a:endParaRPr lang="en-US"/>
           </a:p>
@@ -1909,7 +1909,7 @@
             <a:fld id="{1D8BD707-D9CF-40AE-B4C6-C98DA3205C09}" type="datetimeFigureOut">
               <a:rPr lang="en-US" smtClean="0"/>
               <a:pPr/>
-              <a:t>6/26/2026</a:t>
+              <a:t>6/30/2026</a:t>
             </a:fld>
             <a:endParaRPr lang="en-US"/>
           </a:p>
@@ -2001,7 +2001,7 @@
             <a:fld id="{1D8BD707-D9CF-40AE-B4C6-C98DA3205C09}" type="datetimeFigureOut">
               <a:rPr lang="en-US" smtClean="0"/>
               <a:pPr/>
-              <a:t>6/26/2026</a:t>
+              <a:t>6/30/2026</a:t>
             </a:fld>
             <a:endParaRPr lang="en-US"/>
           </a:p>
@@ -2273,7 +2273,7 @@
             <a:fld id="{1D8BD707-D9CF-40AE-B4C6-C98DA3205C09}" type="datetimeFigureOut">
               <a:rPr lang="en-US" smtClean="0"/>
               <a:pPr/>
-              <a:t>6/26/2026</a:t>
+              <a:t>6/30/2026</a:t>
             </a:fld>
             <a:endParaRPr lang="en-US"/>
           </a:p>
@@ -2522,7 +2522,7 @@
             <a:fld id="{1D8BD707-D9CF-40AE-B4C6-C98DA3205C09}" type="datetimeFigureOut">
               <a:rPr lang="en-US" smtClean="0"/>
               <a:pPr/>
-              <a:t>6/26/2026</a:t>
+              <a:t>6/30/2026</a:t>
             </a:fld>
             <a:endParaRPr lang="en-US"/>
           </a:p>
@@ -2730,7 +2730,7 @@
             <a:fld id="{1D8BD707-D9CF-40AE-B4C6-C98DA3205C09}" type="datetimeFigureOut">
               <a:rPr lang="en-US" smtClean="0"/>
               <a:pPr/>
-              <a:t>6/26/2026</a:t>
+              <a:t>6/30/2026</a:t>
             </a:fld>
             <a:endParaRPr lang="en-US"/>
           </a:p>
@@ -11288,7 +11288,7 @@
         </p:nvGrpSpPr>
         <p:grpSpPr>
           <a:xfrm>
-            <a:off x="9677048" y="6286689"/>
+            <a:off x="9677048" y="7810500"/>
             <a:ext cx="6611142" cy="685611"/>
             <a:chOff x="0" y="0"/>
             <a:chExt cx="1741206" cy="180572"/>
@@ -11514,7 +11514,7 @@
         <p:spPr>
           <a:xfrm>
             <a:off x="9863310" y="2085223"/>
-            <a:ext cx="7395990" cy="5927392"/>
+            <a:ext cx="7395990" cy="7517571"/>
           </a:xfrm>
           <a:prstGeom prst="rect">
             <a:avLst/>
@@ -11526,7 +11526,7 @@
           </a:bodyPr>
           <a:lstStyle/>
           <a:p>
-            <a:pPr algn="l">
+            <a:pPr>
               <a:lnSpc>
                 <a:spcPts val="3067"/>
               </a:lnSpc>
@@ -11599,12 +11599,24 @@
                 <a:solidFill>
                   <a:srgbClr val="FFD300"/>
                 </a:solidFill>
+                <a:latin typeface="Open Sans"/>
+                <a:ea typeface="Open Sans"/>
+                <a:cs typeface="Open Sans"/>
+                <a:sym typeface="Open Sans"/>
+              </a:rPr>
+              <a:t>[UNIDADES]</a:t>
+            </a:r>
+            <a:r>
+              <a:rPr lang="en-US" sz="2190" b="1" i="1" dirty="0">
+                <a:solidFill>
+                  <a:srgbClr val="FFD300"/>
+                </a:solidFill>
                 <a:latin typeface="Open Sans Bold Italics"/>
                 <a:ea typeface="Open Sans Bold Italics"/>
                 <a:cs typeface="Open Sans Bold Italics"/>
                 <a:sym typeface="Open Sans Bold Italics"/>
               </a:rPr>
-              <a:t>[UNIDADES] </a:t>
+              <a:t> </a:t>
             </a:r>
             <a:r>
               <a:rPr lang="en-US" sz="2190" b="1" i="1" dirty="0" err="1">
@@ -11629,7 +11641,7 @@
             </a:endParaRPr>
           </a:p>
           <a:p>
-            <a:pPr algn="l">
+            <a:pPr>
               <a:lnSpc>
                 <a:spcPts val="3067"/>
               </a:lnSpc>
@@ -11648,7 +11660,7 @@
             </a:endParaRPr>
           </a:p>
           <a:p>
-            <a:pPr algn="l">
+            <a:pPr>
               <a:lnSpc>
                 <a:spcPts val="3067"/>
               </a:lnSpc>
@@ -11694,7 +11706,7 @@
             </a:r>
           </a:p>
           <a:p>
-            <a:pPr algn="l">
+            <a:pPr>
               <a:lnSpc>
                 <a:spcPts val="3067"/>
               </a:lnSpc>
@@ -11713,7 +11725,7 @@
             </a:endParaRPr>
           </a:p>
           <a:p>
-            <a:pPr algn="l">
+            <a:pPr>
               <a:lnSpc>
                 <a:spcPts val="3067"/>
               </a:lnSpc>
@@ -11747,7 +11759,7 @@
             </a:r>
           </a:p>
           <a:p>
-            <a:pPr algn="l">
+            <a:pPr>
               <a:lnSpc>
                 <a:spcPts val="3067"/>
               </a:lnSpc>
@@ -11766,7 +11778,7 @@
             </a:endParaRPr>
           </a:p>
           <a:p>
-            <a:pPr algn="l">
+            <a:pPr>
               <a:lnSpc>
                 <a:spcPts val="3067"/>
               </a:lnSpc>
@@ -11775,176 +11787,102 @@
               </a:spcBef>
             </a:pPr>
             <a:r>
-              <a:rPr lang="en-US" sz="2190" dirty="0" err="1">
-                <a:solidFill>
-                  <a:srgbClr val="FFFFFF"/>
-                </a:solidFill>
-                <a:latin typeface="Open Sans"/>
-                <a:ea typeface="Open Sans"/>
-                <a:cs typeface="Open Sans"/>
-                <a:sym typeface="Open Sans"/>
-              </a:rPr>
-              <a:t>Incluso</a:t>
-            </a:r>
-            <a:r>
-              <a:rPr lang="en-US" sz="2190" dirty="0">
-                <a:solidFill>
-                  <a:srgbClr val="FFFFFF"/>
-                </a:solidFill>
-                <a:latin typeface="Open Sans"/>
-                <a:ea typeface="Open Sans"/>
-                <a:cs typeface="Open Sans"/>
-                <a:sym typeface="Open Sans"/>
+              <a:rPr lang="en-US" sz="2190" b="1" i="1" dirty="0" err="1">
+                <a:solidFill>
+                  <a:srgbClr val="FFD300"/>
+                </a:solidFill>
+                <a:latin typeface="Open Sans Bold Italics"/>
+                <a:ea typeface="Open Sans Bold Italics"/>
+                <a:cs typeface="Open Sans Bold Italics"/>
+                <a:sym typeface="Open Sans Bold Italics"/>
+              </a:rPr>
+              <a:t>Período</a:t>
+            </a:r>
+            <a:r>
+              <a:rPr lang="en-US" sz="2190" b="1" i="1" dirty="0">
+                <a:solidFill>
+                  <a:srgbClr val="FFD300"/>
+                </a:solidFill>
+                <a:latin typeface="Open Sans Bold Italics"/>
+                <a:ea typeface="Open Sans Bold Italics"/>
+                <a:cs typeface="Open Sans Bold Italics"/>
+                <a:sym typeface="Open Sans Bold Italics"/>
               </a:rPr>
               <a:t> </a:t>
             </a:r>
             <a:r>
-              <a:rPr lang="en-US" sz="2190" dirty="0" err="1">
-                <a:solidFill>
-                  <a:srgbClr val="FFFFFF"/>
-                </a:solidFill>
-                <a:latin typeface="Open Sans"/>
-                <a:ea typeface="Open Sans"/>
-                <a:cs typeface="Open Sans"/>
-                <a:sym typeface="Open Sans"/>
-              </a:rPr>
-              <a:t>na</a:t>
-            </a:r>
-            <a:r>
-              <a:rPr lang="en-US" sz="2190" dirty="0">
-                <a:solidFill>
-                  <a:srgbClr val="FFFFFF"/>
-                </a:solidFill>
-                <a:latin typeface="Open Sans"/>
-                <a:ea typeface="Open Sans"/>
-                <a:cs typeface="Open Sans"/>
-                <a:sym typeface="Open Sans"/>
-              </a:rPr>
-              <a:t> </a:t>
-            </a:r>
-            <a:r>
-              <a:rPr lang="en-US" sz="2190" dirty="0" err="1">
-                <a:solidFill>
-                  <a:srgbClr val="FFFFFF"/>
-                </a:solidFill>
-                <a:latin typeface="Open Sans"/>
-                <a:ea typeface="Open Sans"/>
-                <a:cs typeface="Open Sans"/>
-                <a:sym typeface="Open Sans"/>
-              </a:rPr>
-              <a:t>estrutura</a:t>
-            </a:r>
-            <a:r>
-              <a:rPr lang="en-US" sz="2190" dirty="0">
-                <a:solidFill>
-                  <a:srgbClr val="FFFFFF"/>
-                </a:solidFill>
-                <a:latin typeface="Open Sans"/>
-                <a:ea typeface="Open Sans"/>
-                <a:cs typeface="Open Sans"/>
-                <a:sym typeface="Open Sans"/>
-              </a:rPr>
-              <a:t> do Container: </a:t>
-            </a:r>
-            <a:r>
-              <a:rPr lang="en-US" sz="2190" dirty="0" err="1">
-                <a:solidFill>
-                  <a:srgbClr val="FFFFFF"/>
-                </a:solidFill>
-                <a:latin typeface="Open Sans"/>
-                <a:ea typeface="Open Sans"/>
-                <a:cs typeface="Open Sans"/>
-                <a:sym typeface="Open Sans"/>
-              </a:rPr>
-              <a:t>Ar-condicionado</a:t>
-            </a:r>
-            <a:r>
-              <a:rPr lang="en-US" sz="2190" dirty="0">
-                <a:solidFill>
-                  <a:srgbClr val="FFFFFF"/>
-                </a:solidFill>
-                <a:latin typeface="Open Sans"/>
-                <a:ea typeface="Open Sans"/>
-                <a:cs typeface="Open Sans"/>
-                <a:sym typeface="Open Sans"/>
-              </a:rPr>
-              <a:t>, </a:t>
-            </a:r>
-            <a:r>
-              <a:rPr lang="en-US" sz="2190" dirty="0" err="1">
-                <a:solidFill>
-                  <a:srgbClr val="FFFFFF"/>
-                </a:solidFill>
-                <a:latin typeface="Open Sans"/>
-                <a:ea typeface="Open Sans"/>
-                <a:cs typeface="Open Sans"/>
-                <a:sym typeface="Open Sans"/>
-              </a:rPr>
-              <a:t>Espelhos</a:t>
-            </a:r>
-            <a:r>
-              <a:rPr lang="en-US" sz="2190" dirty="0">
-                <a:solidFill>
-                  <a:srgbClr val="FFFFFF"/>
-                </a:solidFill>
-                <a:latin typeface="Open Sans"/>
-                <a:ea typeface="Open Sans"/>
-                <a:cs typeface="Open Sans"/>
-                <a:sym typeface="Open Sans"/>
-              </a:rPr>
-              <a:t>, </a:t>
-            </a:r>
-            <a:r>
-              <a:rPr lang="en-US" sz="2190" dirty="0" err="1">
-                <a:solidFill>
-                  <a:srgbClr val="FFFFFF"/>
-                </a:solidFill>
-                <a:latin typeface="Open Sans"/>
-                <a:ea typeface="Open Sans"/>
-                <a:cs typeface="Open Sans"/>
-                <a:sym typeface="Open Sans"/>
-              </a:rPr>
-              <a:t>Comunicação</a:t>
-            </a:r>
-            <a:r>
-              <a:rPr lang="en-US" sz="2190" dirty="0">
-                <a:solidFill>
-                  <a:srgbClr val="FFFFFF"/>
-                </a:solidFill>
-                <a:latin typeface="Open Sans"/>
-                <a:ea typeface="Open Sans"/>
-                <a:cs typeface="Open Sans"/>
-                <a:sym typeface="Open Sans"/>
-              </a:rPr>
-              <a:t> visual </a:t>
-            </a:r>
-            <a:r>
-              <a:rPr lang="en-US" sz="2190" dirty="0" err="1">
-                <a:solidFill>
-                  <a:srgbClr val="FFFFFF"/>
-                </a:solidFill>
-                <a:latin typeface="Open Sans"/>
-                <a:ea typeface="Open Sans"/>
-                <a:cs typeface="Open Sans"/>
-                <a:sym typeface="Open Sans"/>
-              </a:rPr>
-              <a:t>padrão</a:t>
-            </a:r>
-            <a:r>
-              <a:rPr lang="en-US" sz="2190" dirty="0">
-                <a:solidFill>
-                  <a:srgbClr val="FFFFFF"/>
-                </a:solidFill>
-                <a:latin typeface="Open Sans"/>
-                <a:ea typeface="Open Sans"/>
-                <a:cs typeface="Open Sans"/>
-                <a:sym typeface="Open Sans"/>
-              </a:rPr>
-              <a:t> Duo Fitness </a:t>
-            </a:r>
-          </a:p>
-          <a:p>
-            <a:pPr algn="l">
+              <a:rPr lang="en-US" sz="2190" b="1" i="1" dirty="0" err="1">
+                <a:solidFill>
+                  <a:srgbClr val="FFD300"/>
+                </a:solidFill>
+                <a:latin typeface="Open Sans Bold Italics"/>
+                <a:ea typeface="Open Sans Bold Italics"/>
+                <a:cs typeface="Open Sans Bold Italics"/>
+                <a:sym typeface="Open Sans Bold Italics"/>
+              </a:rPr>
+              <a:t>Promocional</a:t>
+            </a:r>
+            <a:r>
+              <a:rPr lang="en-US" sz="2190" b="1" i="1" dirty="0">
+                <a:solidFill>
+                  <a:srgbClr val="FFD300"/>
+                </a:solidFill>
+                <a:latin typeface="Open Sans Bold Italics"/>
+                <a:ea typeface="Open Sans Bold Italics"/>
+                <a:cs typeface="Open Sans Bold Italics"/>
+                <a:sym typeface="Open Sans Bold Italics"/>
+              </a:rPr>
+              <a:t>:</a:t>
+            </a:r>
+            <a:br>
+              <a:rPr lang="en-US" sz="2190" b="1" i="1" dirty="0">
+                <a:solidFill>
+                  <a:srgbClr val="FFD300"/>
+                </a:solidFill>
+                <a:latin typeface="Open Sans Bold Italics"/>
+                <a:ea typeface="Open Sans Bold Italics"/>
+                <a:cs typeface="Open Sans Bold Italics"/>
+                <a:sym typeface="Open Sans Bold Italics"/>
+              </a:rPr>
+            </a:br>
+            <a:r>
+              <a:rPr lang="en-US" sz="2190" b="1" i="1" dirty="0">
+                <a:solidFill>
+                  <a:srgbClr val="FFD300"/>
+                </a:solidFill>
+                <a:latin typeface="Open Sans Bold Italics"/>
+                <a:ea typeface="Open Sans Bold Italics"/>
+                <a:cs typeface="Open Sans Bold Italics"/>
+                <a:sym typeface="Open Sans Bold Italics"/>
+              </a:rPr>
+              <a:t>- [PROMO_MES]</a:t>
+            </a:r>
+            <a:br>
+              <a:rPr lang="en-US" sz="2190" b="1" i="1" dirty="0">
+                <a:solidFill>
+                  <a:srgbClr val="FFD300"/>
+                </a:solidFill>
+                <a:latin typeface="Open Sans Bold Italics"/>
+                <a:ea typeface="Open Sans Bold Italics"/>
+                <a:cs typeface="Open Sans Bold Italics"/>
+                <a:sym typeface="Open Sans Bold Italics"/>
+              </a:rPr>
+            </a:br>
+            <a:r>
+              <a:rPr lang="en-US" sz="2190" b="1" i="1" dirty="0">
+                <a:solidFill>
+                  <a:srgbClr val="FFD300"/>
+                </a:solidFill>
+                <a:latin typeface="Open Sans Bold Italics"/>
+                <a:ea typeface="Open Sans Bold Italics"/>
+                <a:cs typeface="Open Sans Bold Italics"/>
+                <a:sym typeface="Open Sans Bold Italics"/>
+              </a:rPr>
+              <a:t>- [PROMO_VALOR]</a:t>
+            </a:r>
+          </a:p>
+          <a:p>
+            <a:pPr>
               <a:lnSpc>
                 <a:spcPts val="3067"/>
               </a:lnSpc>
@@ -11952,8 +11890,27 @@
                 <a:spcPct val="0"/>
               </a:spcBef>
             </a:pPr>
-            <a:r>
-              <a:rPr lang="en-US" sz="2190" dirty="0">
+            <a:endParaRPr lang="en-US" sz="2190" b="1" i="1" dirty="0">
+              <a:solidFill>
+                <a:srgbClr val="FFD300"/>
+              </a:solidFill>
+              <a:latin typeface="Open Sans Bold Italics"/>
+              <a:ea typeface="Open Sans Bold Italics"/>
+              <a:cs typeface="Open Sans Bold Italics"/>
+              <a:sym typeface="Open Sans Bold Italics"/>
+            </a:endParaRPr>
+          </a:p>
+          <a:p>
+            <a:pPr>
+              <a:lnSpc>
+                <a:spcPts val="3067"/>
+              </a:lnSpc>
+              <a:spcBef>
+                <a:spcPct val="0"/>
+              </a:spcBef>
+            </a:pPr>
+            <a:r>
+              <a:rPr lang="en-US" sz="2190" dirty="0" err="1">
                 <a:solidFill>
                   <a:srgbClr val="FFFFFF"/>
                 </a:solidFill>
@@ -11962,10 +11919,10 @@
                 <a:cs typeface="Open Sans"/>
                 <a:sym typeface="Open Sans"/>
               </a:rPr>
-              <a:t>e a infra-</a:t>
-            </a:r>
-            <a:r>
-              <a:rPr lang="en-US" sz="2190" dirty="0" err="1">
+              <a:t>Incluso</a:t>
+            </a:r>
+            <a:r>
+              <a:rPr lang="en-US" sz="2190" dirty="0">
                 <a:solidFill>
                   <a:srgbClr val="FFFFFF"/>
                 </a:solidFill>
@@ -11974,10 +11931,10 @@
                 <a:cs typeface="Open Sans"/>
                 <a:sym typeface="Open Sans"/>
               </a:rPr>
-              <a:t>estrutura</a:t>
-            </a:r>
-            <a:r>
-              <a:rPr lang="en-US" sz="2190" dirty="0">
+              <a:t> </a:t>
+            </a:r>
+            <a:r>
+              <a:rPr lang="en-US" sz="2190" dirty="0" err="1">
                 <a:solidFill>
                   <a:srgbClr val="FFFFFF"/>
                 </a:solidFill>
@@ -11986,10 +11943,10 @@
                 <a:cs typeface="Open Sans"/>
                 <a:sym typeface="Open Sans"/>
               </a:rPr>
-              <a:t> para </a:t>
-            </a:r>
-            <a:r>
-              <a:rPr lang="en-US" sz="2190" dirty="0" err="1">
+              <a:t>na</a:t>
+            </a:r>
+            <a:r>
+              <a:rPr lang="en-US" sz="2190" dirty="0">
                 <a:solidFill>
                   <a:srgbClr val="FFFFFF"/>
                 </a:solidFill>
@@ -11998,10 +11955,10 @@
                 <a:cs typeface="Open Sans"/>
                 <a:sym typeface="Open Sans"/>
               </a:rPr>
-              <a:t>instalação</a:t>
-            </a:r>
-            <a:r>
-              <a:rPr lang="en-US" sz="2190" dirty="0">
+              <a:t> </a:t>
+            </a:r>
+            <a:r>
+              <a:rPr lang="en-US" sz="2190" dirty="0" err="1">
                 <a:solidFill>
                   <a:srgbClr val="FFFFFF"/>
                 </a:solidFill>
@@ -12010,11 +11967,189 @@
                 <a:cs typeface="Open Sans"/>
                 <a:sym typeface="Open Sans"/>
               </a:rPr>
+              <a:t>estrutura</a:t>
+            </a:r>
+            <a:r>
+              <a:rPr lang="en-US" sz="2190" dirty="0">
+                <a:solidFill>
+                  <a:srgbClr val="FFFFFF"/>
+                </a:solidFill>
+                <a:latin typeface="Open Sans"/>
+                <a:ea typeface="Open Sans"/>
+                <a:cs typeface="Open Sans"/>
+                <a:sym typeface="Open Sans"/>
+              </a:rPr>
+              <a:t> do Container: </a:t>
+            </a:r>
+            <a:r>
+              <a:rPr lang="en-US" sz="2190" dirty="0" err="1">
+                <a:solidFill>
+                  <a:srgbClr val="FFFFFF"/>
+                </a:solidFill>
+                <a:latin typeface="Open Sans"/>
+                <a:ea typeface="Open Sans"/>
+                <a:cs typeface="Open Sans"/>
+                <a:sym typeface="Open Sans"/>
+              </a:rPr>
+              <a:t>Ar-condicionado</a:t>
+            </a:r>
+            <a:r>
+              <a:rPr lang="en-US" sz="2190" dirty="0">
+                <a:solidFill>
+                  <a:srgbClr val="FFFFFF"/>
+                </a:solidFill>
+                <a:latin typeface="Open Sans"/>
+                <a:ea typeface="Open Sans"/>
+                <a:cs typeface="Open Sans"/>
+                <a:sym typeface="Open Sans"/>
+              </a:rPr>
+              <a:t>, </a:t>
+            </a:r>
+            <a:r>
+              <a:rPr lang="en-US" sz="2190" dirty="0" err="1">
+                <a:solidFill>
+                  <a:srgbClr val="FFFFFF"/>
+                </a:solidFill>
+                <a:latin typeface="Open Sans"/>
+                <a:ea typeface="Open Sans"/>
+                <a:cs typeface="Open Sans"/>
+                <a:sym typeface="Open Sans"/>
+              </a:rPr>
+              <a:t>Espelhos</a:t>
+            </a:r>
+            <a:r>
+              <a:rPr lang="en-US" sz="2190" dirty="0">
+                <a:solidFill>
+                  <a:srgbClr val="FFFFFF"/>
+                </a:solidFill>
+                <a:latin typeface="Open Sans"/>
+                <a:ea typeface="Open Sans"/>
+                <a:cs typeface="Open Sans"/>
+                <a:sym typeface="Open Sans"/>
+              </a:rPr>
+              <a:t>, </a:t>
+            </a:r>
+            <a:r>
+              <a:rPr lang="en-US" sz="2190" dirty="0" err="1">
+                <a:solidFill>
+                  <a:srgbClr val="FFFFFF"/>
+                </a:solidFill>
+                <a:latin typeface="Open Sans"/>
+                <a:ea typeface="Open Sans"/>
+                <a:cs typeface="Open Sans"/>
+                <a:sym typeface="Open Sans"/>
+              </a:rPr>
+              <a:t>Comunicação</a:t>
+            </a:r>
+            <a:r>
+              <a:rPr lang="en-US" sz="2190" dirty="0">
+                <a:solidFill>
+                  <a:srgbClr val="FFFFFF"/>
+                </a:solidFill>
+                <a:latin typeface="Open Sans"/>
+                <a:ea typeface="Open Sans"/>
+                <a:cs typeface="Open Sans"/>
+                <a:sym typeface="Open Sans"/>
+              </a:rPr>
+              <a:t> visual </a:t>
+            </a:r>
+            <a:r>
+              <a:rPr lang="en-US" sz="2190" dirty="0" err="1">
+                <a:solidFill>
+                  <a:srgbClr val="FFFFFF"/>
+                </a:solidFill>
+                <a:latin typeface="Open Sans"/>
+                <a:ea typeface="Open Sans"/>
+                <a:cs typeface="Open Sans"/>
+                <a:sym typeface="Open Sans"/>
+              </a:rPr>
+              <a:t>padrão</a:t>
+            </a:r>
+            <a:r>
+              <a:rPr lang="en-US" sz="2190" dirty="0">
+                <a:solidFill>
+                  <a:srgbClr val="FFFFFF"/>
+                </a:solidFill>
+                <a:latin typeface="Open Sans"/>
+                <a:ea typeface="Open Sans"/>
+                <a:cs typeface="Open Sans"/>
+                <a:sym typeface="Open Sans"/>
+              </a:rPr>
+              <a:t> Duo Fitness </a:t>
+            </a:r>
+          </a:p>
+          <a:p>
+            <a:pPr>
+              <a:lnSpc>
+                <a:spcPts val="3067"/>
+              </a:lnSpc>
+              <a:spcBef>
+                <a:spcPct val="0"/>
+              </a:spcBef>
+            </a:pPr>
+            <a:r>
+              <a:rPr lang="en-US" sz="2190" dirty="0">
+                <a:solidFill>
+                  <a:srgbClr val="FFFFFF"/>
+                </a:solidFill>
+                <a:latin typeface="Open Sans"/>
+                <a:ea typeface="Open Sans"/>
+                <a:cs typeface="Open Sans"/>
+                <a:sym typeface="Open Sans"/>
+              </a:rPr>
+              <a:t>e a infra-</a:t>
+            </a:r>
+            <a:r>
+              <a:rPr lang="en-US" sz="2190" dirty="0" err="1">
+                <a:solidFill>
+                  <a:srgbClr val="FFFFFF"/>
+                </a:solidFill>
+                <a:latin typeface="Open Sans"/>
+                <a:ea typeface="Open Sans"/>
+                <a:cs typeface="Open Sans"/>
+                <a:sym typeface="Open Sans"/>
+              </a:rPr>
+              <a:t>estrutura</a:t>
+            </a:r>
+            <a:r>
+              <a:rPr lang="en-US" sz="2190" dirty="0">
+                <a:solidFill>
+                  <a:srgbClr val="FFFFFF"/>
+                </a:solidFill>
+                <a:latin typeface="Open Sans"/>
+                <a:ea typeface="Open Sans"/>
+                <a:cs typeface="Open Sans"/>
+                <a:sym typeface="Open Sans"/>
+              </a:rPr>
+              <a:t> para </a:t>
+            </a:r>
+            <a:r>
+              <a:rPr lang="en-US" sz="2190" dirty="0" err="1">
+                <a:solidFill>
+                  <a:srgbClr val="FFFFFF"/>
+                </a:solidFill>
+                <a:latin typeface="Open Sans"/>
+                <a:ea typeface="Open Sans"/>
+                <a:cs typeface="Open Sans"/>
+                <a:sym typeface="Open Sans"/>
+              </a:rPr>
+              <a:t>instalação</a:t>
+            </a:r>
+            <a:r>
+              <a:rPr lang="en-US" sz="2190" dirty="0">
+                <a:solidFill>
+                  <a:srgbClr val="FFFFFF"/>
+                </a:solidFill>
+                <a:latin typeface="Open Sans"/>
+                <a:ea typeface="Open Sans"/>
+                <a:cs typeface="Open Sans"/>
+                <a:sym typeface="Open Sans"/>
+              </a:rPr>
               <a:t>.</a:t>
             </a:r>
           </a:p>
           <a:p>
-            <a:pPr algn="l">
+            <a:pPr>
               <a:lnSpc>
                 <a:spcPts val="3067"/>
               </a:lnSpc>
@@ -12033,7 +12168,7 @@
             </a:endParaRPr>
           </a:p>
           <a:p>
-            <a:pPr algn="l">
+            <a:pPr>
               <a:lnSpc>
                 <a:spcPts val="3067"/>
               </a:lnSpc>
@@ -12052,7 +12187,7 @@
             </a:endParaRPr>
           </a:p>
           <a:p>
-            <a:pPr algn="l">
+            <a:pPr>
               <a:lnSpc>
                 <a:spcPts val="3067"/>
               </a:lnSpc>
@@ -12158,7 +12293,7 @@
             </a:r>
           </a:p>
           <a:p>
-            <a:pPr algn="l">
+            <a:pPr>
               <a:lnSpc>
                 <a:spcPts val="3067"/>
               </a:lnSpc>
@@ -12177,7 +12312,7 @@
             </a:endParaRPr>
           </a:p>
           <a:p>
-            <a:pPr algn="l">
+            <a:pPr>
               <a:lnSpc>
                 <a:spcPts val="3067"/>
               </a:lnSpc>
@@ -12196,7 +12331,7 @@
             </a:endParaRPr>
           </a:p>
           <a:p>
-            <a:pPr algn="l">
+            <a:pPr>
               <a:lnSpc>
                 <a:spcPts val="3067"/>
               </a:lnSpc>
